--- a/Origo_admin_tutorial_swedish.pptx
+++ b/Origo_admin_tutorial_swedish.pptx
@@ -276,7 +276,7 @@
           <a:p>
             <a:fld id="{2105AD5F-378A-4E69-A069-43E8F66DA733}" type="datetimeFigureOut">
               <a:rPr lang="sv-SE" smtClean="0"/>
-              <a:t>2026-09-11</a:t>
+              <a:t>2026-09-22</a:t>
             </a:fld>
             <a:endParaRPr lang="sv-SE"/>
           </a:p>
@@ -1080,7 +1080,7 @@
           <a:p>
             <a:fld id="{D8D49A41-4903-4E30-BEC5-3ED4B3E2B810}" type="datetimeFigureOut">
               <a:rPr lang="sv-SE" smtClean="0"/>
-              <a:t>2026-09-11</a:t>
+              <a:t>2026-09-22</a:t>
             </a:fld>
             <a:endParaRPr lang="sv-SE"/>
           </a:p>
@@ -1386,7 +1386,7 @@
           <a:p>
             <a:fld id="{D8D49A41-4903-4E30-BEC5-3ED4B3E2B810}" type="datetimeFigureOut">
               <a:rPr lang="sv-SE" smtClean="0"/>
-              <a:t>2026-09-11</a:t>
+              <a:t>2026-09-22</a:t>
             </a:fld>
             <a:endParaRPr lang="sv-SE"/>
           </a:p>
@@ -1650,7 +1650,7 @@
           <a:p>
             <a:fld id="{D8D49A41-4903-4E30-BEC5-3ED4B3E2B810}" type="datetimeFigureOut">
               <a:rPr lang="sv-SE" smtClean="0"/>
-              <a:t>2026-09-11</a:t>
+              <a:t>2026-09-22</a:t>
             </a:fld>
             <a:endParaRPr lang="sv-SE"/>
           </a:p>
@@ -1863,7 +1863,7 @@
           <a:p>
             <a:fld id="{D8D49A41-4903-4E30-BEC5-3ED4B3E2B810}" type="datetimeFigureOut">
               <a:rPr lang="sv-SE" smtClean="0"/>
-              <a:t>2026-09-11</a:t>
+              <a:t>2026-09-22</a:t>
             </a:fld>
             <a:endParaRPr lang="sv-SE"/>
           </a:p>
@@ -2076,7 +2076,7 @@
           <a:p>
             <a:fld id="{D8D49A41-4903-4E30-BEC5-3ED4B3E2B810}" type="datetimeFigureOut">
               <a:rPr lang="sv-SE" smtClean="0"/>
-              <a:t>2026-09-11</a:t>
+              <a:t>2026-09-22</a:t>
             </a:fld>
             <a:endParaRPr lang="sv-SE"/>
           </a:p>
@@ -2313,7 +2313,7 @@
           <a:p>
             <a:fld id="{D8D49A41-4903-4E30-BEC5-3ED4B3E2B810}" type="datetimeFigureOut">
               <a:rPr lang="sv-SE" smtClean="0"/>
-              <a:t>2026-09-11</a:t>
+              <a:t>2026-09-22</a:t>
             </a:fld>
             <a:endParaRPr lang="sv-SE"/>
           </a:p>
@@ -2442,7 +2442,7 @@
           <a:p>
             <a:fld id="{D8D49A41-4903-4E30-BEC5-3ED4B3E2B810}" type="datetimeFigureOut">
               <a:rPr lang="sv-SE" smtClean="0"/>
-              <a:t>2026-09-11</a:t>
+              <a:t>2026-09-22</a:t>
             </a:fld>
             <a:endParaRPr lang="sv-SE"/>
           </a:p>
@@ -2884,7 +2884,7 @@
           <a:p>
             <a:fld id="{D8D49A41-4903-4E30-BEC5-3ED4B3E2B810}" type="datetimeFigureOut">
               <a:rPr lang="sv-SE" smtClean="0"/>
-              <a:t>2026-09-11</a:t>
+              <a:t>2026-09-22</a:t>
             </a:fld>
             <a:endParaRPr lang="sv-SE"/>
           </a:p>
@@ -3190,7 +3190,7 @@
           <a:p>
             <a:fld id="{D8D49A41-4903-4E30-BEC5-3ED4B3E2B810}" type="datetimeFigureOut">
               <a:rPr lang="sv-SE" smtClean="0"/>
-              <a:t>2026-09-11</a:t>
+              <a:t>2026-09-22</a:t>
             </a:fld>
             <a:endParaRPr lang="sv-SE"/>
           </a:p>
@@ -3439,7 +3439,7 @@
           <a:p>
             <a:fld id="{D8D49A41-4903-4E30-BEC5-3ED4B3E2B810}" type="datetimeFigureOut">
               <a:rPr lang="sv-SE" smtClean="0"/>
-              <a:t>2026-09-11</a:t>
+              <a:t>2026-09-22</a:t>
             </a:fld>
             <a:endParaRPr lang="sv-SE"/>
           </a:p>
@@ -3760,7 +3760,7 @@
           <a:p>
             <a:fld id="{D8D49A41-4903-4E30-BEC5-3ED4B3E2B810}" type="datetimeFigureOut">
               <a:rPr lang="sv-SE" smtClean="0"/>
-              <a:t>2026-09-11</a:t>
+              <a:t>2026-09-22</a:t>
             </a:fld>
             <a:endParaRPr lang="sv-SE"/>
           </a:p>
@@ -3973,7 +3973,7 @@
           <a:p>
             <a:fld id="{D8D49A41-4903-4E30-BEC5-3ED4B3E2B810}" type="datetimeFigureOut">
               <a:rPr lang="sv-SE" smtClean="0"/>
-              <a:t>2026-09-11</a:t>
+              <a:t>2026-09-22</a:t>
             </a:fld>
             <a:endParaRPr lang="sv-SE"/>
           </a:p>
@@ -4186,7 +4186,7 @@
           <a:p>
             <a:fld id="{D8D49A41-4903-4E30-BEC5-3ED4B3E2B810}" type="datetimeFigureOut">
               <a:rPr lang="sv-SE" smtClean="0"/>
-              <a:t>2026-09-11</a:t>
+              <a:t>2026-09-22</a:t>
             </a:fld>
             <a:endParaRPr lang="sv-SE"/>
           </a:p>
@@ -4423,7 +4423,7 @@
           <a:p>
             <a:fld id="{D8D49A41-4903-4E30-BEC5-3ED4B3E2B810}" type="datetimeFigureOut">
               <a:rPr lang="sv-SE" smtClean="0"/>
-              <a:t>2026-09-11</a:t>
+              <a:t>2026-09-22</a:t>
             </a:fld>
             <a:endParaRPr lang="sv-SE"/>
           </a:p>
@@ -4552,7 +4552,7 @@
           <a:p>
             <a:fld id="{D8D49A41-4903-4E30-BEC5-3ED4B3E2B810}" type="datetimeFigureOut">
               <a:rPr lang="sv-SE" smtClean="0"/>
-              <a:t>2026-09-11</a:t>
+              <a:t>2026-09-22</a:t>
             </a:fld>
             <a:endParaRPr lang="sv-SE"/>
           </a:p>
@@ -4994,7 +4994,7 @@
           <a:p>
             <a:fld id="{D8D49A41-4903-4E30-BEC5-3ED4B3E2B810}" type="datetimeFigureOut">
               <a:rPr lang="sv-SE" smtClean="0"/>
-              <a:t>2026-09-11</a:t>
+              <a:t>2026-09-22</a:t>
             </a:fld>
             <a:endParaRPr lang="sv-SE"/>
           </a:p>
@@ -5300,7 +5300,7 @@
           <a:p>
             <a:fld id="{D8D49A41-4903-4E30-BEC5-3ED4B3E2B810}" type="datetimeFigureOut">
               <a:rPr lang="sv-SE" smtClean="0"/>
-              <a:t>2026-09-11</a:t>
+              <a:t>2026-09-22</a:t>
             </a:fld>
             <a:endParaRPr lang="sv-SE"/>
           </a:p>
@@ -5564,7 +5564,7 @@
           <a:p>
             <a:fld id="{D8D49A41-4903-4E30-BEC5-3ED4B3E2B810}" type="datetimeFigureOut">
               <a:rPr lang="sv-SE" smtClean="0"/>
-              <a:t>2026-09-11</a:t>
+              <a:t>2026-09-22</a:t>
             </a:fld>
             <a:endParaRPr lang="sv-SE"/>
           </a:p>
@@ -5777,7 +5777,7 @@
           <a:p>
             <a:fld id="{D8D49A41-4903-4E30-BEC5-3ED4B3E2B810}" type="datetimeFigureOut">
               <a:rPr lang="sv-SE" smtClean="0"/>
-              <a:t>2026-09-11</a:t>
+              <a:t>2026-09-22</a:t>
             </a:fld>
             <a:endParaRPr lang="sv-SE"/>
           </a:p>
@@ -6047,7 +6047,7 @@
           <a:p>
             <a:fld id="{D8D49A41-4903-4E30-BEC5-3ED4B3E2B810}" type="datetimeFigureOut">
               <a:rPr lang="sv-SE" smtClean="0"/>
-              <a:t>2026-09-11</a:t>
+              <a:t>2026-09-22</a:t>
             </a:fld>
             <a:endParaRPr lang="sv-SE"/>
           </a:p>
@@ -6296,7 +6296,7 @@
           <a:p>
             <a:fld id="{D8D49A41-4903-4E30-BEC5-3ED4B3E2B810}" type="datetimeFigureOut">
               <a:rPr lang="sv-SE" smtClean="0"/>
-              <a:t>2026-09-11</a:t>
+              <a:t>2026-09-22</a:t>
             </a:fld>
             <a:endParaRPr lang="sv-SE"/>
           </a:p>
@@ -6533,7 +6533,7 @@
           <a:p>
             <a:fld id="{D8D49A41-4903-4E30-BEC5-3ED4B3E2B810}" type="datetimeFigureOut">
               <a:rPr lang="sv-SE" smtClean="0"/>
-              <a:t>2026-09-11</a:t>
+              <a:t>2026-09-22</a:t>
             </a:fld>
             <a:endParaRPr lang="sv-SE"/>
           </a:p>
@@ -6662,7 +6662,7 @@
           <a:p>
             <a:fld id="{D8D49A41-4903-4E30-BEC5-3ED4B3E2B810}" type="datetimeFigureOut">
               <a:rPr lang="sv-SE" smtClean="0"/>
-              <a:t>2026-09-11</a:t>
+              <a:t>2026-09-22</a:t>
             </a:fld>
             <a:endParaRPr lang="sv-SE"/>
           </a:p>
@@ -7104,7 +7104,7 @@
           <a:p>
             <a:fld id="{D8D49A41-4903-4E30-BEC5-3ED4B3E2B810}" type="datetimeFigureOut">
               <a:rPr lang="sv-SE" smtClean="0"/>
-              <a:t>2026-09-11</a:t>
+              <a:t>2026-09-22</a:t>
             </a:fld>
             <a:endParaRPr lang="sv-SE"/>
           </a:p>
@@ -7410,7 +7410,7 @@
           <a:p>
             <a:fld id="{D8D49A41-4903-4E30-BEC5-3ED4B3E2B810}" type="datetimeFigureOut">
               <a:rPr lang="sv-SE" smtClean="0"/>
-              <a:t>2026-09-11</a:t>
+              <a:t>2026-09-22</a:t>
             </a:fld>
             <a:endParaRPr lang="sv-SE"/>
           </a:p>
@@ -7674,7 +7674,7 @@
           <a:p>
             <a:fld id="{D8D49A41-4903-4E30-BEC5-3ED4B3E2B810}" type="datetimeFigureOut">
               <a:rPr lang="sv-SE" smtClean="0"/>
-              <a:t>2026-09-11</a:t>
+              <a:t>2026-09-22</a:t>
             </a:fld>
             <a:endParaRPr lang="sv-SE"/>
           </a:p>
@@ -7887,7 +7887,7 @@
           <a:p>
             <a:fld id="{D8D49A41-4903-4E30-BEC5-3ED4B3E2B810}" type="datetimeFigureOut">
               <a:rPr lang="sv-SE" smtClean="0"/>
-              <a:t>2026-09-11</a:t>
+              <a:t>2026-09-22</a:t>
             </a:fld>
             <a:endParaRPr lang="sv-SE"/>
           </a:p>
@@ -8100,7 +8100,7 @@
           <a:p>
             <a:fld id="{D8D49A41-4903-4E30-BEC5-3ED4B3E2B810}" type="datetimeFigureOut">
               <a:rPr lang="sv-SE" smtClean="0"/>
-              <a:t>2026-09-11</a:t>
+              <a:t>2026-09-22</a:t>
             </a:fld>
             <a:endParaRPr lang="sv-SE"/>
           </a:p>
@@ -8337,7 +8337,7 @@
           <a:p>
             <a:fld id="{D8D49A41-4903-4E30-BEC5-3ED4B3E2B810}" type="datetimeFigureOut">
               <a:rPr lang="sv-SE" smtClean="0"/>
-              <a:t>2026-09-11</a:t>
+              <a:t>2026-09-22</a:t>
             </a:fld>
             <a:endParaRPr lang="sv-SE"/>
           </a:p>
@@ -8568,7 +8568,7 @@
           <a:p>
             <a:fld id="{D8D49A41-4903-4E30-BEC5-3ED4B3E2B810}" type="datetimeFigureOut">
               <a:rPr lang="sv-SE" smtClean="0"/>
-              <a:t>2026-09-11</a:t>
+              <a:t>2026-09-22</a:t>
             </a:fld>
             <a:endParaRPr lang="sv-SE"/>
           </a:p>
@@ -8681,7 +8681,7 @@
           <a:p>
             <a:fld id="{D8D49A41-4903-4E30-BEC5-3ED4B3E2B810}" type="datetimeFigureOut">
               <a:rPr lang="sv-SE" smtClean="0"/>
-              <a:t>2026-09-11</a:t>
+              <a:t>2026-09-22</a:t>
             </a:fld>
             <a:endParaRPr lang="sv-SE"/>
           </a:p>
@@ -8896,7 +8896,7 @@
           <a:p>
             <a:fld id="{D8D49A41-4903-4E30-BEC5-3ED4B3E2B810}" type="datetimeFigureOut">
               <a:rPr lang="sv-SE" smtClean="0"/>
-              <a:t>2026-09-11</a:t>
+              <a:t>2026-09-22</a:t>
             </a:fld>
             <a:endParaRPr lang="sv-SE"/>
           </a:p>
@@ -9207,7 +9207,7 @@
           <a:p>
             <a:fld id="{D8D49A41-4903-4E30-BEC5-3ED4B3E2B810}" type="datetimeFigureOut">
               <a:rPr lang="sv-SE" smtClean="0"/>
-              <a:t>2026-09-11</a:t>
+              <a:t>2026-09-22</a:t>
             </a:fld>
             <a:endParaRPr lang="sv-SE"/>
           </a:p>
@@ -9349,7 +9349,7 @@
           <a:p>
             <a:fld id="{D8D49A41-4903-4E30-BEC5-3ED4B3E2B810}" type="datetimeFigureOut">
               <a:rPr lang="sv-SE" smtClean="0"/>
-              <a:t>2026-09-11</a:t>
+              <a:t>2026-09-22</a:t>
             </a:fld>
             <a:endParaRPr lang="sv-SE"/>
           </a:p>
@@ -9478,7 +9478,7 @@
           <a:p>
             <a:fld id="{D8D49A41-4903-4E30-BEC5-3ED4B3E2B810}" type="datetimeFigureOut">
               <a:rPr lang="sv-SE" smtClean="0"/>
-              <a:t>2026-09-11</a:t>
+              <a:t>2026-09-22</a:t>
             </a:fld>
             <a:endParaRPr lang="sv-SE"/>
           </a:p>
@@ -9962,7 +9962,7 @@
             <a:fld id="{D8D49A41-4903-4E30-BEC5-3ED4B3E2B810}" type="datetimeFigureOut">
               <a:rPr lang="sv-SE" smtClean="0"/>
               <a:pPr/>
-              <a:t>2026-09-11</a:t>
+              <a:t>2026-09-22</a:t>
             </a:fld>
             <a:endParaRPr lang="sv-SE"/>
           </a:p>
@@ -10574,7 +10574,7 @@
             <a:fld id="{D8D49A41-4903-4E30-BEC5-3ED4B3E2B810}" type="datetimeFigureOut">
               <a:rPr lang="sv-SE" smtClean="0"/>
               <a:pPr/>
-              <a:t>2026-09-11</a:t>
+              <a:t>2026-09-22</a:t>
             </a:fld>
             <a:endParaRPr lang="sv-SE"/>
           </a:p>
@@ -11221,7 +11221,7 @@
             <a:fld id="{D8D49A41-4903-4E30-BEC5-3ED4B3E2B810}" type="datetimeFigureOut">
               <a:rPr lang="sv-SE" smtClean="0"/>
               <a:pPr/>
-              <a:t>2026-09-11</a:t>
+              <a:t>2026-09-22</a:t>
             </a:fld>
             <a:endParaRPr lang="sv-SE"/>
           </a:p>
@@ -11833,7 +11833,7 @@
             <a:fld id="{D8D49A41-4903-4E30-BEC5-3ED4B3E2B810}" type="datetimeFigureOut">
               <a:rPr lang="sv-SE" smtClean="0"/>
               <a:pPr/>
-              <a:t>2026-09-11</a:t>
+              <a:t>2026-09-22</a:t>
             </a:fld>
             <a:endParaRPr lang="sv-SE"/>
           </a:p>
@@ -12445,7 +12445,7 @@
             <a:fld id="{D8D49A41-4903-4E30-BEC5-3ED4B3E2B810}" type="datetimeFigureOut">
               <a:rPr lang="sv-SE" smtClean="0"/>
               <a:pPr/>
-              <a:t>2026-09-11</a:t>
+              <a:t>2026-09-22</a:t>
             </a:fld>
             <a:endParaRPr lang="sv-SE"/>
           </a:p>
@@ -16833,13 +16833,13 @@
               <a:t>:</a:t>
             </a:r>
             <a:br>
-              <a:rPr lang="sv-SE" sz="2400" dirty="0"/>
+              <a:rPr lang="sv-SE" sz="2400"/>
             </a:br>
             <a:r>
-              <a:rPr lang="sv-SE" sz="2400" dirty="0">
+              <a:rPr lang="sv-SE" sz="2400">
                 <a:hlinkClick r:id="rId2"/>
               </a:rPr>
-              <a:t>https://github.com/Kristianstad/origo</a:t>
+              <a:t>https://github.com/Kristianstad/origo-admin</a:t>
             </a:r>
             <a:endParaRPr lang="sv-SE" sz="2400" dirty="0"/>
           </a:p>
@@ -16893,8 +16893,8 @@
         </p:nvSpPr>
         <p:spPr>
           <a:xfrm>
-            <a:off x="1170485" y="3982064"/>
-            <a:ext cx="7399950" cy="2246769"/>
+            <a:off x="1170484" y="3982064"/>
+            <a:ext cx="7511399" cy="2246769"/>
           </a:xfrm>
           <a:prstGeom prst="rect">
             <a:avLst/>
@@ -16959,12 +16959,8 @@
               <a:t>run</a:t>
             </a:r>
             <a:r>
-              <a:rPr lang="sv-SE" sz="2000"/>
-              <a:t> -p </a:t>
-            </a:r>
-            <a:r>
               <a:rPr lang="sv-SE" sz="2000" dirty="0"/>
-              <a:t>8080:8080 ghcr.io/</a:t>
+              <a:t> -p 8080:8080 ghcr.io/</a:t>
             </a:r>
             <a:r>
               <a:rPr lang="sv-SE" sz="2000" dirty="0" err="1"/>
@@ -16972,7 +16968,7 @@
             </a:r>
             <a:r>
               <a:rPr lang="sv-SE" sz="2000" dirty="0"/>
-              <a:t>/origo:2.10.0-adm</a:t>
+              <a:t>/origo-admin:2.10.0</a:t>
             </a:r>
           </a:p>
           <a:p>
@@ -23182,6 +23178,12 @@
 </file>
 
 <file path=customXml/item2.xml><?xml version="1.0" encoding="utf-8"?>
+<p:properties xmlns:p="http://schemas.microsoft.com/office/2006/metadata/properties" xmlns:xsi="http://www.w3.org/2001/XMLSchema-instance" xmlns:pc="http://schemas.microsoft.com/office/infopath/2007/PartnerControls">
+  <documentManagement/>
+</p:properties>
+</file>
+
+<file path=customXml/item3.xml><?xml version="1.0" encoding="utf-8"?>
 <ct:contentTypeSchema xmlns:ct="http://schemas.microsoft.com/office/2006/metadata/contentType" xmlns:ma="http://schemas.microsoft.com/office/2006/metadata/properties/metaAttributes" ct:_="" ma:_="" ma:contentTypeName="dokument" ma:contentTypeID="0x010100BF93C0C5EE7F83438D3374EF6FC6CFE8" ma:contentTypeVersion="6" ma:contentTypeDescription="Skapa ett nytt dokument." ma:contentTypeScope="" ma:versionID="47a8963a7c37e56dddba9289e5978949">
   <xsd:schema xmlns:xsd="http://www.w3.org/2001/XMLSchema" xmlns:xs="http://www.w3.org/2001/XMLSchema" xmlns:p="http://schemas.microsoft.com/office/2006/metadata/properties" xmlns:ns2="630a2048-6a54-4210-bba6-95b147291d33" xmlns:ns3="43cfa058-710b-45d5-80d9-51034d8b2dca" targetNamespace="http://schemas.microsoft.com/office/2006/metadata/properties" ma:root="true" ma:fieldsID="3eb248da3570b7edd177235fee2ed6f5" ns2:_="" ns3:_="">
     <xsd:import namespace="630a2048-6a54-4210-bba6-95b147291d33"/>
@@ -23358,12 +23360,6 @@
 </ct:contentTypeSchema>
 </file>
 
-<file path=customXml/item3.xml><?xml version="1.0" encoding="utf-8"?>
-<p:properties xmlns:p="http://schemas.microsoft.com/office/2006/metadata/properties" xmlns:xsi="http://www.w3.org/2001/XMLSchema-instance" xmlns:pc="http://schemas.microsoft.com/office/infopath/2007/PartnerControls">
-  <documentManagement/>
-</p:properties>
-</file>
-
 <file path=customXml/itemProps1.xml><?xml version="1.0" encoding="utf-8"?>
 <ds:datastoreItem xmlns:ds="http://schemas.openxmlformats.org/officeDocument/2006/customXml" ds:itemID="{58E68E51-B06E-4E0F-ABEE-C754E002158D}">
   <ds:schemaRefs>
@@ -23373,6 +23369,23 @@
 </file>
 
 <file path=customXml/itemProps2.xml><?xml version="1.0" encoding="utf-8"?>
+<ds:datastoreItem xmlns:ds="http://schemas.openxmlformats.org/officeDocument/2006/customXml" ds:itemID="{983C3FF3-C4B2-4E0C-A8BA-FDE126DD742C}">
+  <ds:schemaRefs>
+    <ds:schemaRef ds:uri="http://schemas.microsoft.com/office/2006/documentManagement/types"/>
+    <ds:schemaRef ds:uri="43cfa058-710b-45d5-80d9-51034d8b2dca"/>
+    <ds:schemaRef ds:uri="http://www.w3.org/XML/1998/namespace"/>
+    <ds:schemaRef ds:uri="630a2048-6a54-4210-bba6-95b147291d33"/>
+    <ds:schemaRef ds:uri="http://purl.org/dc/terms/"/>
+    <ds:schemaRef ds:uri="http://schemas.microsoft.com/office/2006/metadata/properties"/>
+    <ds:schemaRef ds:uri="http://schemas.openxmlformats.org/package/2006/metadata/core-properties"/>
+    <ds:schemaRef ds:uri="http://purl.org/dc/dcmitype/"/>
+    <ds:schemaRef ds:uri="http://schemas.microsoft.com/office/infopath/2007/PartnerControls"/>
+    <ds:schemaRef ds:uri="http://purl.org/dc/elements/1.1/"/>
+  </ds:schemaRefs>
+</ds:datastoreItem>
+</file>
+
+<file path=customXml/itemProps3.xml><?xml version="1.0" encoding="utf-8"?>
 <ds:datastoreItem xmlns:ds="http://schemas.openxmlformats.org/officeDocument/2006/customXml" ds:itemID="{A27087E6-7CF9-4CCE-84CA-97F5AB54E191}">
   <ds:schemaRefs>
     <ds:schemaRef ds:uri="http://schemas.microsoft.com/office/2006/metadata/contentType"/>
@@ -23389,13 +23402,4 @@
     <ds:schemaRef ds:uri="http://schemas.microsoft.com/internal/obd"/>
   </ds:schemaRefs>
 </ds:datastoreItem>
-</file>
-
-<file path=customXml/itemProps3.xml><?xml version="1.0" encoding="utf-8"?>
-<ds:datastoreItem xmlns:ds="http://schemas.openxmlformats.org/officeDocument/2006/customXml" ds:itemID="{983C3FF3-C4B2-4E0C-A8BA-FDE126DD742C}">
-  <ds:schemaRefs>
-    <ds:schemaRef ds:uri="http://schemas.microsoft.com/office/2006/metadata/properties"/>
-    <ds:schemaRef ds:uri="http://schemas.microsoft.com/office/infopath/2007/PartnerControls"/>
-  </ds:schemaRefs>
-</ds:datastoreItem>
 </file>